--- a/lessen/politiek/materiaal/Les1_Wat_Is_Politiek.pptx
+++ b/lessen/politiek/materiaal/Les1_Wat_Is_Politiek.pptx
@@ -292,9 +292,7 @@
         <p:txBody>
           <a:bodyPr/>
           <a:lstStyle/>
-          <a:p>
-            <a:endParaRPr/>
-          </a:p>
+          <a:p/>
         </p:txBody>
       </p:sp>
       <p:sp>
@@ -376,9 +374,7 @@
         <p:txBody>
           <a:bodyPr/>
           <a:lstStyle/>
-          <a:p>
-            <a:endParaRPr/>
-          </a:p>
+          <a:p/>
         </p:txBody>
       </p:sp>
       <p:sp>
@@ -460,9 +456,7 @@
         <p:txBody>
           <a:bodyPr/>
           <a:lstStyle/>
-          <a:p>
-            <a:endParaRPr/>
-          </a:p>
+          <a:p/>
         </p:txBody>
       </p:sp>
       <p:sp>
@@ -544,9 +538,7 @@
         <p:txBody>
           <a:bodyPr/>
           <a:lstStyle/>
-          <a:p>
-            <a:endParaRPr/>
-          </a:p>
+          <a:p/>
         </p:txBody>
       </p:sp>
       <p:sp>
@@ -628,9 +620,7 @@
         <p:txBody>
           <a:bodyPr/>
           <a:lstStyle/>
-          <a:p>
-            <a:endParaRPr/>
-          </a:p>
+          <a:p/>
         </p:txBody>
       </p:sp>
       <p:sp>
@@ -712,9 +702,7 @@
         <p:txBody>
           <a:bodyPr/>
           <a:lstStyle/>
-          <a:p>
-            <a:endParaRPr/>
-          </a:p>
+          <a:p/>
         </p:txBody>
       </p:sp>
       <p:sp>
@@ -796,9 +784,7 @@
         <p:txBody>
           <a:bodyPr/>
           <a:lstStyle/>
-          <a:p>
-            <a:endParaRPr/>
-          </a:p>
+          <a:p/>
         </p:txBody>
       </p:sp>
       <p:sp>
@@ -880,9 +866,7 @@
         <p:txBody>
           <a:bodyPr/>
           <a:lstStyle/>
-          <a:p>
-            <a:endParaRPr/>
-          </a:p>
+          <a:p/>
         </p:txBody>
       </p:sp>
       <p:sp>
@@ -964,9 +948,7 @@
         <p:txBody>
           <a:bodyPr/>
           <a:lstStyle/>
-          <a:p>
-            <a:endParaRPr/>
-          </a:p>
+          <a:p/>
         </p:txBody>
       </p:sp>
       <p:sp>
@@ -1048,9 +1030,7 @@
         <p:txBody>
           <a:bodyPr/>
           <a:lstStyle/>
-          <a:p>
-            <a:endParaRPr/>
-          </a:p>
+          <a:p/>
         </p:txBody>
       </p:sp>
       <p:sp>
@@ -1132,9 +1112,7 @@
         <p:txBody>
           <a:bodyPr/>
           <a:lstStyle/>
-          <a:p>
-            <a:endParaRPr/>
-          </a:p>
+          <a:p/>
         </p:txBody>
       </p:sp>
       <p:sp>
@@ -1216,9 +1194,7 @@
         <p:txBody>
           <a:bodyPr/>
           <a:lstStyle/>
-          <a:p>
-            <a:endParaRPr/>
-          </a:p>
+          <a:p/>
         </p:txBody>
       </p:sp>
       <p:sp>
@@ -1300,9 +1276,7 @@
         <p:txBody>
           <a:bodyPr/>
           <a:lstStyle/>
-          <a:p>
-            <a:endParaRPr/>
-          </a:p>
+          <a:p/>
         </p:txBody>
       </p:sp>
       <p:sp>
@@ -4583,7 +4557,7 @@
               <a:buNone/>
             </a:pPr>
             <a:r>
-              <a:rPr lang="en-US" b="1" dirty="0">
+              <a:rPr lang="en-US" sz="1800" b="1" dirty="0">
                 <a:solidFill>
                   <a:srgbClr val="1E293B"/>
                 </a:solidFill>
@@ -4591,29 +4565,7 @@
                 <a:ea typeface="Calibri" pitchFamily="34" charset="-122"/>
                 <a:cs typeface="Calibri" pitchFamily="34" charset="-120"/>
               </a:rPr>
-              <a:t>6 fiches (3 rood &amp; 3 </a:t>
-            </a:r>
-            <a:r>
-              <a:rPr lang="en-US" b="1" dirty="0" err="1">
-                <a:solidFill>
-                  <a:srgbClr val="1E293B"/>
-                </a:solidFill>
-                <a:latin typeface="Calibri" pitchFamily="34" charset="0"/>
-                <a:ea typeface="Calibri" pitchFamily="34" charset="-122"/>
-                <a:cs typeface="Calibri" pitchFamily="34" charset="-120"/>
-              </a:rPr>
-              <a:t>groen</a:t>
-            </a:r>
-            <a:r>
-              <a:rPr lang="en-US" b="1" dirty="0">
-                <a:solidFill>
-                  <a:srgbClr val="1E293B"/>
-                </a:solidFill>
-                <a:latin typeface="Calibri" pitchFamily="34" charset="0"/>
-                <a:ea typeface="Calibri" pitchFamily="34" charset="-122"/>
-                <a:cs typeface="Calibri" pitchFamily="34" charset="-120"/>
-              </a:rPr>
-              <a:t>)</a:t>
+              <a:t>3 EENS + 3 ONEENS</a:t>
             </a:r>
             <a:endParaRPr lang="en-US" sz="1800" dirty="0"/>
           </a:p>
@@ -4652,337 +4604,7 @@
                 <a:ea typeface="Calibri" pitchFamily="34" charset="-122"/>
                 <a:cs typeface="Calibri" pitchFamily="34" charset="-120"/>
               </a:rPr>
-              <a:t>Jouw hand. Met </a:t>
-            </a:r>
-            <a:r>
-              <a:rPr lang="en-US" sz="1400" dirty="0" err="1">
-                <a:solidFill>
-                  <a:srgbClr val="475569"/>
-                </a:solidFill>
-                <a:latin typeface="Calibri" pitchFamily="34" charset="0"/>
-                <a:ea typeface="Calibri" pitchFamily="34" charset="-122"/>
-                <a:cs typeface="Calibri" pitchFamily="34" charset="-120"/>
-              </a:rPr>
-              <a:t>groen</a:t>
-            </a:r>
-            <a:r>
-              <a:rPr lang="en-US" sz="1400" dirty="0">
-                <a:solidFill>
-                  <a:srgbClr val="475569"/>
-                </a:solidFill>
-                <a:latin typeface="Calibri" pitchFamily="34" charset="0"/>
-                <a:ea typeface="Calibri" pitchFamily="34" charset="-122"/>
-                <a:cs typeface="Calibri" pitchFamily="34" charset="-120"/>
-              </a:rPr>
-              <a:t> stem je </a:t>
-            </a:r>
-            <a:r>
-              <a:rPr lang="en-US" sz="1400" dirty="0" err="1">
-                <a:solidFill>
-                  <a:srgbClr val="475569"/>
-                </a:solidFill>
-                <a:latin typeface="Calibri" pitchFamily="34" charset="0"/>
-                <a:ea typeface="Calibri" pitchFamily="34" charset="-122"/>
-                <a:cs typeface="Calibri" pitchFamily="34" charset="-120"/>
-              </a:rPr>
-              <a:t>voor</a:t>
-            </a:r>
-            <a:r>
-              <a:rPr lang="en-US" sz="1400" dirty="0">
-                <a:solidFill>
-                  <a:srgbClr val="475569"/>
-                </a:solidFill>
-                <a:latin typeface="Calibri" pitchFamily="34" charset="0"/>
-                <a:ea typeface="Calibri" pitchFamily="34" charset="-122"/>
-                <a:cs typeface="Calibri" pitchFamily="34" charset="-120"/>
-              </a:rPr>
-              <a:t>, met rood </a:t>
-            </a:r>
-            <a:r>
-              <a:rPr lang="en-US" sz="1400" dirty="0" err="1">
-                <a:solidFill>
-                  <a:srgbClr val="475569"/>
-                </a:solidFill>
-                <a:latin typeface="Calibri" pitchFamily="34" charset="0"/>
-                <a:ea typeface="Calibri" pitchFamily="34" charset="-122"/>
-                <a:cs typeface="Calibri" pitchFamily="34" charset="-120"/>
-              </a:rPr>
-              <a:t>tegen</a:t>
-            </a:r>
-            <a:r>
-              <a:rPr lang="en-US" sz="1400" dirty="0">
-                <a:solidFill>
-                  <a:srgbClr val="475569"/>
-                </a:solidFill>
-                <a:latin typeface="Calibri" pitchFamily="34" charset="0"/>
-                <a:ea typeface="Calibri" pitchFamily="34" charset="-122"/>
-                <a:cs typeface="Calibri" pitchFamily="34" charset="-120"/>
-              </a:rPr>
-              <a:t>. Je </a:t>
-            </a:r>
-            <a:r>
-              <a:rPr lang="en-US" sz="1400" dirty="0" err="1">
-                <a:solidFill>
-                  <a:srgbClr val="475569"/>
-                </a:solidFill>
-                <a:latin typeface="Calibri" pitchFamily="34" charset="0"/>
-                <a:ea typeface="Calibri" pitchFamily="34" charset="-122"/>
-                <a:cs typeface="Calibri" pitchFamily="34" charset="-120"/>
-              </a:rPr>
-              <a:t>hebt</a:t>
-            </a:r>
-            <a:r>
-              <a:rPr lang="en-US" sz="1400" dirty="0">
-                <a:solidFill>
-                  <a:srgbClr val="475569"/>
-                </a:solidFill>
-                <a:latin typeface="Calibri" pitchFamily="34" charset="0"/>
-                <a:ea typeface="Calibri" pitchFamily="34" charset="-122"/>
-                <a:cs typeface="Calibri" pitchFamily="34" charset="-120"/>
-              </a:rPr>
-              <a:t> </a:t>
-            </a:r>
-            <a:r>
-              <a:rPr lang="en-US" sz="1400" dirty="0" err="1">
-                <a:solidFill>
-                  <a:srgbClr val="475569"/>
-                </a:solidFill>
-                <a:latin typeface="Calibri" pitchFamily="34" charset="0"/>
-                <a:ea typeface="Calibri" pitchFamily="34" charset="-122"/>
-                <a:cs typeface="Calibri" pitchFamily="34" charset="-120"/>
-              </a:rPr>
-              <a:t>dus</a:t>
-            </a:r>
-            <a:r>
-              <a:rPr lang="en-US" sz="1400" dirty="0">
-                <a:solidFill>
-                  <a:srgbClr val="475569"/>
-                </a:solidFill>
-                <a:latin typeface="Calibri" pitchFamily="34" charset="0"/>
-                <a:ea typeface="Calibri" pitchFamily="34" charset="-122"/>
-                <a:cs typeface="Calibri" pitchFamily="34" charset="-120"/>
-              </a:rPr>
-              <a:t> maar 3 </a:t>
-            </a:r>
-            <a:r>
-              <a:rPr lang="en-US" sz="1400" dirty="0" err="1">
-                <a:solidFill>
-                  <a:srgbClr val="475569"/>
-                </a:solidFill>
-                <a:latin typeface="Calibri" pitchFamily="34" charset="0"/>
-                <a:ea typeface="Calibri" pitchFamily="34" charset="-122"/>
-                <a:cs typeface="Calibri" pitchFamily="34" charset="-120"/>
-              </a:rPr>
-              <a:t>voor</a:t>
-            </a:r>
-            <a:r>
-              <a:rPr lang="en-US" sz="1400" dirty="0">
-                <a:solidFill>
-                  <a:srgbClr val="475569"/>
-                </a:solidFill>
-                <a:latin typeface="Calibri" pitchFamily="34" charset="0"/>
-                <a:ea typeface="Calibri" pitchFamily="34" charset="-122"/>
-                <a:cs typeface="Calibri" pitchFamily="34" charset="-120"/>
-              </a:rPr>
-              <a:t> </a:t>
-            </a:r>
-            <a:r>
-              <a:rPr lang="en-US" sz="1400" dirty="0" err="1">
-                <a:solidFill>
-                  <a:srgbClr val="475569"/>
-                </a:solidFill>
-                <a:latin typeface="Calibri" pitchFamily="34" charset="0"/>
-                <a:ea typeface="Calibri" pitchFamily="34" charset="-122"/>
-                <a:cs typeface="Calibri" pitchFamily="34" charset="-120"/>
-              </a:rPr>
-              <a:t>en</a:t>
-            </a:r>
-            <a:r>
-              <a:rPr lang="en-US" sz="1400" dirty="0">
-                <a:solidFill>
-                  <a:srgbClr val="475569"/>
-                </a:solidFill>
-                <a:latin typeface="Calibri" pitchFamily="34" charset="0"/>
-                <a:ea typeface="Calibri" pitchFamily="34" charset="-122"/>
-                <a:cs typeface="Calibri" pitchFamily="34" charset="-120"/>
-              </a:rPr>
-              <a:t> 3 </a:t>
-            </a:r>
-            <a:r>
-              <a:rPr lang="en-US" sz="1400" dirty="0" err="1">
-                <a:solidFill>
-                  <a:srgbClr val="475569"/>
-                </a:solidFill>
-                <a:latin typeface="Calibri" pitchFamily="34" charset="0"/>
-                <a:ea typeface="Calibri" pitchFamily="34" charset="-122"/>
-                <a:cs typeface="Calibri" pitchFamily="34" charset="-120"/>
-              </a:rPr>
-              <a:t>tegen</a:t>
-            </a:r>
-            <a:r>
-              <a:rPr lang="en-US" sz="1400" dirty="0">
-                <a:solidFill>
-                  <a:srgbClr val="475569"/>
-                </a:solidFill>
-                <a:latin typeface="Calibri" pitchFamily="34" charset="0"/>
-                <a:ea typeface="Calibri" pitchFamily="34" charset="-122"/>
-                <a:cs typeface="Calibri" pitchFamily="34" charset="-120"/>
-              </a:rPr>
-              <a:t> </a:t>
-            </a:r>
-            <a:r>
-              <a:rPr lang="en-US" sz="1400" dirty="0" err="1">
-                <a:solidFill>
-                  <a:srgbClr val="475569"/>
-                </a:solidFill>
-                <a:latin typeface="Calibri" pitchFamily="34" charset="0"/>
-                <a:ea typeface="Calibri" pitchFamily="34" charset="-122"/>
-                <a:cs typeface="Calibri" pitchFamily="34" charset="-120"/>
-              </a:rPr>
-              <a:t>stemmen</a:t>
-            </a:r>
-            <a:r>
-              <a:rPr lang="en-US" sz="1400" dirty="0">
-                <a:solidFill>
-                  <a:srgbClr val="475569"/>
-                </a:solidFill>
-                <a:latin typeface="Calibri" pitchFamily="34" charset="0"/>
-                <a:ea typeface="Calibri" pitchFamily="34" charset="-122"/>
-                <a:cs typeface="Calibri" pitchFamily="34" charset="-120"/>
-              </a:rPr>
-              <a:t>, </a:t>
-            </a:r>
-            <a:r>
-              <a:rPr lang="en-US" sz="1400" dirty="0" err="1">
-                <a:solidFill>
-                  <a:srgbClr val="475569"/>
-                </a:solidFill>
-                <a:latin typeface="Calibri" pitchFamily="34" charset="0"/>
-                <a:ea typeface="Calibri" pitchFamily="34" charset="-122"/>
-                <a:cs typeface="Calibri" pitchFamily="34" charset="-120"/>
-              </a:rPr>
-              <a:t>terwijl</a:t>
-            </a:r>
-            <a:r>
-              <a:rPr lang="en-US" sz="1400" dirty="0">
-                <a:solidFill>
-                  <a:srgbClr val="475569"/>
-                </a:solidFill>
-                <a:latin typeface="Calibri" pitchFamily="34" charset="0"/>
-                <a:ea typeface="Calibri" pitchFamily="34" charset="-122"/>
-                <a:cs typeface="Calibri" pitchFamily="34" charset="-120"/>
-              </a:rPr>
-              <a:t> er 6 </a:t>
-            </a:r>
-            <a:r>
-              <a:rPr lang="en-US" sz="1400" dirty="0" err="1">
-                <a:solidFill>
-                  <a:srgbClr val="475569"/>
-                </a:solidFill>
-                <a:latin typeface="Calibri" pitchFamily="34" charset="0"/>
-                <a:ea typeface="Calibri" pitchFamily="34" charset="-122"/>
-                <a:cs typeface="Calibri" pitchFamily="34" charset="-120"/>
-              </a:rPr>
-              <a:t>voorstellen</a:t>
-            </a:r>
-            <a:r>
-              <a:rPr lang="en-US" sz="1400" dirty="0">
-                <a:solidFill>
-                  <a:srgbClr val="475569"/>
-                </a:solidFill>
-                <a:latin typeface="Calibri" pitchFamily="34" charset="0"/>
-                <a:ea typeface="Calibri" pitchFamily="34" charset="-122"/>
-                <a:cs typeface="Calibri" pitchFamily="34" charset="-120"/>
-              </a:rPr>
-              <a:t> </a:t>
-            </a:r>
-            <a:r>
-              <a:rPr lang="en-US" sz="1400" dirty="0" err="1">
-                <a:solidFill>
-                  <a:srgbClr val="475569"/>
-                </a:solidFill>
-                <a:latin typeface="Calibri" pitchFamily="34" charset="0"/>
-                <a:ea typeface="Calibri" pitchFamily="34" charset="-122"/>
-                <a:cs typeface="Calibri" pitchFamily="34" charset="-120"/>
-              </a:rPr>
-              <a:t>zijn</a:t>
-            </a:r>
-            <a:r>
-              <a:rPr lang="en-US" sz="1400" dirty="0">
-                <a:solidFill>
-                  <a:srgbClr val="475569"/>
-                </a:solidFill>
-                <a:latin typeface="Calibri" pitchFamily="34" charset="0"/>
-                <a:ea typeface="Calibri" pitchFamily="34" charset="-122"/>
-                <a:cs typeface="Calibri" pitchFamily="34" charset="-120"/>
-              </a:rPr>
-              <a:t>. Je </a:t>
-            </a:r>
-            <a:r>
-              <a:rPr lang="en-US" sz="1400" dirty="0" err="1">
-                <a:solidFill>
-                  <a:srgbClr val="475569"/>
-                </a:solidFill>
-                <a:latin typeface="Calibri" pitchFamily="34" charset="0"/>
-                <a:ea typeface="Calibri" pitchFamily="34" charset="-122"/>
-                <a:cs typeface="Calibri" pitchFamily="34" charset="-120"/>
-              </a:rPr>
-              <a:t>moet</a:t>
-            </a:r>
-            <a:r>
-              <a:rPr lang="en-US" sz="1400" dirty="0">
-                <a:solidFill>
-                  <a:srgbClr val="475569"/>
-                </a:solidFill>
-                <a:latin typeface="Calibri" pitchFamily="34" charset="0"/>
-                <a:ea typeface="Calibri" pitchFamily="34" charset="-122"/>
-                <a:cs typeface="Calibri" pitchFamily="34" charset="-120"/>
-              </a:rPr>
-              <a:t> </a:t>
-            </a:r>
-            <a:r>
-              <a:rPr lang="en-US" sz="1400" dirty="0" err="1">
-                <a:solidFill>
-                  <a:srgbClr val="475569"/>
-                </a:solidFill>
-                <a:latin typeface="Calibri" pitchFamily="34" charset="0"/>
-                <a:ea typeface="Calibri" pitchFamily="34" charset="-122"/>
-                <a:cs typeface="Calibri" pitchFamily="34" charset="-120"/>
-              </a:rPr>
-              <a:t>dus</a:t>
-            </a:r>
-            <a:r>
-              <a:rPr lang="en-US" sz="1400" dirty="0">
-                <a:solidFill>
-                  <a:srgbClr val="475569"/>
-                </a:solidFill>
-                <a:latin typeface="Calibri" pitchFamily="34" charset="0"/>
-                <a:ea typeface="Calibri" pitchFamily="34" charset="-122"/>
-                <a:cs typeface="Calibri" pitchFamily="34" charset="-120"/>
-              </a:rPr>
-              <a:t> </a:t>
-            </a:r>
-            <a:r>
-              <a:rPr lang="en-US" sz="1400" dirty="0" err="1">
-                <a:solidFill>
-                  <a:srgbClr val="475569"/>
-                </a:solidFill>
-                <a:latin typeface="Calibri" pitchFamily="34" charset="0"/>
-                <a:ea typeface="Calibri" pitchFamily="34" charset="-122"/>
-                <a:cs typeface="Calibri" pitchFamily="34" charset="-120"/>
-              </a:rPr>
-              <a:t>kiezen</a:t>
-            </a:r>
-            <a:r>
-              <a:rPr lang="en-US" sz="1400" dirty="0">
-                <a:solidFill>
-                  <a:srgbClr val="475569"/>
-                </a:solidFill>
-                <a:latin typeface="Calibri" pitchFamily="34" charset="0"/>
-                <a:ea typeface="Calibri" pitchFamily="34" charset="-122"/>
-                <a:cs typeface="Calibri" pitchFamily="34" charset="-120"/>
-              </a:rPr>
-              <a:t>!</a:t>
+              <a:t>Jouw hand. Je hebt minder kaarten dan stemmen — dus je moet kiezen.</a:t>
             </a:r>
             <a:endParaRPr lang="en-US" sz="1400" dirty="0"/>
           </a:p>
